--- a/docs/Presentation - Recommendation Systems. Theoretical Approaches.pptx
+++ b/docs/Presentation - Recommendation Systems. Theoretical Approaches.pptx
@@ -3258,7 +3258,7 @@
             </a:r>
             <a:r>
               <a:rPr lang="uk-UA" noProof="0" dirty="0"/>
-              <a:t> їх з урахуванням контексту. Особливо цікавий напрям — діалогові рекомендації, коли користувач у природному діалозі формулює запит на кшталт «знайди мені щось схоже на фільм Початок (2010), але простіший». Окрім того, </a:t>
+              <a:t> їх з урахуванням контексту. Особливо цікавий напрям — діалогові рекомендації, коли користувач у природному діалозі формулює запит на кшталт «знайди мені щось схоже на фільм Початок (2010), але менш фантастичний». Окрім того, </a:t>
             </a:r>
             <a:r>
               <a:rPr lang="uk-UA" noProof="0" dirty="0" err="1"/>
@@ -7381,7 +7381,7 @@
           <a:p>
             <a:fld id="{48F63A3B-78C7-47BE-AE5E-E10140E04643}" type="slidenum">
               <a:rPr lang="en-US" smtClean="0"/>
-              <a:t>‹#›</a:t>
+              <a:t>‹№›</a:t>
             </a:fld>
             <a:endParaRPr lang="en-US" dirty="0"/>
           </a:p>
@@ -7552,7 +7552,7 @@
           <a:p>
             <a:fld id="{48F63A3B-78C7-47BE-AE5E-E10140E04643}" type="slidenum">
               <a:rPr lang="en-US" smtClean="0"/>
-              <a:t>‹#›</a:t>
+              <a:t>‹№›</a:t>
             </a:fld>
             <a:endParaRPr lang="en-US" dirty="0"/>
           </a:p>
@@ -7733,7 +7733,7 @@
           <a:p>
             <a:fld id="{48F63A3B-78C7-47BE-AE5E-E10140E04643}" type="slidenum">
               <a:rPr lang="en-US" smtClean="0"/>
-              <a:t>‹#›</a:t>
+              <a:t>‹№›</a:t>
             </a:fld>
             <a:endParaRPr lang="en-US" dirty="0"/>
           </a:p>
@@ -7939,7 +7939,7 @@
           <a:p>
             <a:fld id="{48F63A3B-78C7-47BE-AE5E-E10140E04643}" type="slidenum">
               <a:rPr lang="en-US" smtClean="0"/>
-              <a:t>‹#›</a:t>
+              <a:t>‹№›</a:t>
             </a:fld>
             <a:endParaRPr lang="en-US" dirty="0"/>
           </a:p>
@@ -8186,7 +8186,7 @@
           <a:p>
             <a:fld id="{48F63A3B-78C7-47BE-AE5E-E10140E04643}" type="slidenum">
               <a:rPr lang="en-US" smtClean="0"/>
-              <a:t>‹#›</a:t>
+              <a:t>‹№›</a:t>
             </a:fld>
             <a:endParaRPr lang="en-US" dirty="0"/>
           </a:p>
@@ -8419,7 +8419,7 @@
           <a:p>
             <a:fld id="{48F63A3B-78C7-47BE-AE5E-E10140E04643}" type="slidenum">
               <a:rPr lang="en-US" smtClean="0"/>
-              <a:t>‹#›</a:t>
+              <a:t>‹№›</a:t>
             </a:fld>
             <a:endParaRPr lang="en-US" dirty="0"/>
           </a:p>
@@ -8787,7 +8787,7 @@
           <a:p>
             <a:fld id="{48F63A3B-78C7-47BE-AE5E-E10140E04643}" type="slidenum">
               <a:rPr lang="en-US" smtClean="0"/>
-              <a:t>‹#›</a:t>
+              <a:t>‹№›</a:t>
             </a:fld>
             <a:endParaRPr lang="en-US" dirty="0"/>
           </a:p>
@@ -8906,7 +8906,7 @@
           <a:p>
             <a:fld id="{48F63A3B-78C7-47BE-AE5E-E10140E04643}" type="slidenum">
               <a:rPr lang="en-US" smtClean="0"/>
-              <a:t>‹#›</a:t>
+              <a:t>‹№›</a:t>
             </a:fld>
             <a:endParaRPr lang="en-US" dirty="0"/>
           </a:p>
@@ -9002,7 +9002,7 @@
           <a:p>
             <a:fld id="{48F63A3B-78C7-47BE-AE5E-E10140E04643}" type="slidenum">
               <a:rPr lang="en-US" smtClean="0"/>
-              <a:t>‹#›</a:t>
+              <a:t>‹№›</a:t>
             </a:fld>
             <a:endParaRPr lang="en-US" dirty="0"/>
           </a:p>
@@ -9280,7 +9280,7 @@
           <a:p>
             <a:fld id="{48F63A3B-78C7-47BE-AE5E-E10140E04643}" type="slidenum">
               <a:rPr lang="en-US" smtClean="0"/>
-              <a:t>‹#›</a:t>
+              <a:t>‹№›</a:t>
             </a:fld>
             <a:endParaRPr lang="en-US" dirty="0"/>
           </a:p>
@@ -9538,7 +9538,7 @@
           <a:p>
             <a:fld id="{48F63A3B-78C7-47BE-AE5E-E10140E04643}" type="slidenum">
               <a:rPr lang="en-US" smtClean="0"/>
-              <a:t>‹#›</a:t>
+              <a:t>‹№›</a:t>
             </a:fld>
             <a:endParaRPr lang="en-US" dirty="0"/>
           </a:p>
@@ -9788,7 +9788,7 @@
           <a:p>
             <a:fld id="{48F63A3B-78C7-47BE-AE5E-E10140E04643}" type="slidenum">
               <a:rPr lang="en-US" smtClean="0"/>
-              <a:t>‹#›</a:t>
+              <a:t>‹№›</a:t>
             </a:fld>
             <a:endParaRPr lang="en-US" dirty="0"/>
           </a:p>
@@ -14942,7 +14942,51 @@
                 <a:ea typeface="Calibri" pitchFamily="34" charset="-122"/>
                 <a:cs typeface="Calibri" pitchFamily="34" charset="-120"/>
               </a:rPr>
-              <a:t>розкласти велику розріджену матрицю R (users × items) </a:t>
+              <a:t>розкласти велику розріджену матрицю R (</a:t>
+            </a:r>
+            <a:r>
+              <a:rPr lang="uk-UA" sz="1300" dirty="0">
+                <a:solidFill>
+                  <a:srgbClr val="334155"/>
+                </a:solidFill>
+                <a:latin typeface="Calibri" pitchFamily="34" charset="0"/>
+                <a:ea typeface="Calibri" pitchFamily="34" charset="-122"/>
+                <a:cs typeface="Calibri" pitchFamily="34" charset="-120"/>
+              </a:rPr>
+              <a:t>користувачі</a:t>
+            </a:r>
+            <a:r>
+              <a:rPr lang="en-US" sz="1300" dirty="0">
+                <a:solidFill>
+                  <a:srgbClr val="334155"/>
+                </a:solidFill>
+                <a:latin typeface="Calibri" pitchFamily="34" charset="0"/>
+                <a:ea typeface="Calibri" pitchFamily="34" charset="-122"/>
+                <a:cs typeface="Calibri" pitchFamily="34" charset="-120"/>
+              </a:rPr>
+              <a:t> × </a:t>
+            </a:r>
+            <a:r>
+              <a:rPr lang="uk-UA" sz="1300" dirty="0">
+                <a:solidFill>
+                  <a:srgbClr val="334155"/>
+                </a:solidFill>
+                <a:latin typeface="Calibri" pitchFamily="34" charset="0"/>
+                <a:ea typeface="Calibri" pitchFamily="34" charset="-122"/>
+                <a:cs typeface="Calibri" pitchFamily="34" charset="-120"/>
+              </a:rPr>
+              <a:t>елементи</a:t>
+            </a:r>
+            <a:r>
+              <a:rPr lang="en-US" sz="1300" dirty="0">
+                <a:solidFill>
+                  <a:srgbClr val="334155"/>
+                </a:solidFill>
+                <a:latin typeface="Calibri" pitchFamily="34" charset="0"/>
+                <a:ea typeface="Calibri" pitchFamily="34" charset="-122"/>
+                <a:cs typeface="Calibri" pitchFamily="34" charset="-120"/>
+              </a:rPr>
+              <a:t>) </a:t>
             </a:r>
             <a:r>
               <a:rPr lang="en-US" sz="1300" dirty="0" err="1">
@@ -14964,7 +15008,51 @@
                 <a:ea typeface="Calibri" pitchFamily="34" charset="-122"/>
                 <a:cs typeface="Calibri" pitchFamily="34" charset="-120"/>
               </a:rPr>
-              <a:t> добуток двох компактних матриць:</a:t>
+              <a:t> добуток </a:t>
+            </a:r>
+            <a:r>
+              <a:rPr lang="en-US" sz="1300" dirty="0" err="1">
+                <a:solidFill>
+                  <a:srgbClr val="334155"/>
+                </a:solidFill>
+                <a:latin typeface="Calibri" pitchFamily="34" charset="0"/>
+                <a:ea typeface="Calibri" pitchFamily="34" charset="-122"/>
+                <a:cs typeface="Calibri" pitchFamily="34" charset="-120"/>
+              </a:rPr>
+              <a:t>двох</a:t>
+            </a:r>
+            <a:r>
+              <a:rPr lang="en-US" sz="1300" dirty="0">
+                <a:solidFill>
+                  <a:srgbClr val="334155"/>
+                </a:solidFill>
+                <a:latin typeface="Calibri" pitchFamily="34" charset="0"/>
+                <a:ea typeface="Calibri" pitchFamily="34" charset="-122"/>
+                <a:cs typeface="Calibri" pitchFamily="34" charset="-120"/>
+              </a:rPr>
+              <a:t> </a:t>
+            </a:r>
+            <a:r>
+              <a:rPr lang="uk-UA" sz="1300" dirty="0">
+                <a:solidFill>
+                  <a:srgbClr val="334155"/>
+                </a:solidFill>
+                <a:latin typeface="Calibri" pitchFamily="34" charset="0"/>
+                <a:ea typeface="Calibri" pitchFamily="34" charset="-122"/>
+                <a:cs typeface="Calibri" pitchFamily="34" charset="-120"/>
+              </a:rPr>
+              <a:t>менших</a:t>
+            </a:r>
+            <a:r>
+              <a:rPr lang="en-US" sz="1300" dirty="0">
+                <a:solidFill>
+                  <a:srgbClr val="334155"/>
+                </a:solidFill>
+                <a:latin typeface="Calibri" pitchFamily="34" charset="0"/>
+                <a:ea typeface="Calibri" pitchFamily="34" charset="-122"/>
+                <a:cs typeface="Calibri" pitchFamily="34" charset="-120"/>
+              </a:rPr>
+              <a:t> матриць:</a:t>
             </a:r>
             <a:endParaRPr lang="en-US" sz="1300" dirty="0"/>
           </a:p>
@@ -15312,7 +15400,51 @@
                 <a:ea typeface="Calibri" pitchFamily="34" charset="-122"/>
                 <a:cs typeface="Calibri" pitchFamily="34" charset="-120"/>
               </a:rPr>
-              <a:t> відомих оцінках, без імпутації нулів</a:t>
+              <a:t> відомих оцінках, </a:t>
+            </a:r>
+            <a:r>
+              <a:rPr lang="en-US" sz="1150" dirty="0" err="1">
+                <a:solidFill>
+                  <a:srgbClr val="334155"/>
+                </a:solidFill>
+                <a:latin typeface="Calibri" pitchFamily="34" charset="0"/>
+                <a:ea typeface="Calibri" pitchFamily="34" charset="-122"/>
+                <a:cs typeface="Calibri" pitchFamily="34" charset="-120"/>
+              </a:rPr>
+              <a:t>без</a:t>
+            </a:r>
+            <a:r>
+              <a:rPr lang="en-US" sz="1150" dirty="0">
+                <a:solidFill>
+                  <a:srgbClr val="334155"/>
+                </a:solidFill>
+                <a:latin typeface="Calibri" pitchFamily="34" charset="0"/>
+                <a:ea typeface="Calibri" pitchFamily="34" charset="-122"/>
+                <a:cs typeface="Calibri" pitchFamily="34" charset="-120"/>
+              </a:rPr>
+              <a:t> </a:t>
+            </a:r>
+            <a:r>
+              <a:rPr lang="uk-UA" sz="1150" dirty="0">
+                <a:solidFill>
+                  <a:srgbClr val="334155"/>
+                </a:solidFill>
+                <a:latin typeface="Calibri" pitchFamily="34" charset="0"/>
+                <a:ea typeface="Calibri" pitchFamily="34" charset="-122"/>
+                <a:cs typeface="Calibri" pitchFamily="34" charset="-120"/>
+              </a:rPr>
+              <a:t>видалення</a:t>
+            </a:r>
+            <a:r>
+              <a:rPr lang="en-US" sz="1150" dirty="0">
+                <a:solidFill>
+                  <a:srgbClr val="334155"/>
+                </a:solidFill>
+                <a:latin typeface="Calibri" pitchFamily="34" charset="0"/>
+                <a:ea typeface="Calibri" pitchFamily="34" charset="-122"/>
+                <a:cs typeface="Calibri" pitchFamily="34" charset="-120"/>
+              </a:rPr>
+              <a:t> нулів</a:t>
             </a:r>
             <a:endParaRPr lang="en-US" sz="1150" dirty="0"/>
           </a:p>
@@ -16356,7 +16488,128 @@
                 <a:ea typeface="Calibri" pitchFamily="34" charset="-122"/>
                 <a:cs typeface="Calibri" pitchFamily="34" charset="-120"/>
               </a:rPr>
-              <a:t>Вибір алгоритму залежно від ситуації: cold start → popular / demographic; досвідчений user → CF або MF. Простота реалізації.</a:t>
+              <a:t>Вибір алгоритму залежно від ситуації: </a:t>
+            </a:r>
+            <a:r>
+              <a:rPr lang="uk-UA" sz="1150" dirty="0">
+                <a:solidFill>
+                  <a:srgbClr val="334155"/>
+                </a:solidFill>
+                <a:latin typeface="Calibri" pitchFamily="34" charset="0"/>
+                <a:ea typeface="Calibri" pitchFamily="34" charset="-122"/>
+                <a:cs typeface="Calibri" pitchFamily="34" charset="-120"/>
+              </a:rPr>
+              <a:t>холодний старт</a:t>
+            </a:r>
+            <a:r>
+              <a:rPr lang="en-US" sz="1150" dirty="0">
+                <a:solidFill>
+                  <a:srgbClr val="334155"/>
+                </a:solidFill>
+                <a:latin typeface="Calibri" pitchFamily="34" charset="0"/>
+                <a:ea typeface="Calibri" pitchFamily="34" charset="-122"/>
+                <a:cs typeface="Calibri" pitchFamily="34" charset="-120"/>
+              </a:rPr>
+              <a:t>→ </a:t>
+            </a:r>
+            <a:r>
+              <a:rPr lang="uk-UA" sz="1150" dirty="0">
+                <a:solidFill>
+                  <a:srgbClr val="334155"/>
+                </a:solidFill>
+                <a:latin typeface="Calibri" pitchFamily="34" charset="0"/>
+                <a:ea typeface="Calibri" pitchFamily="34" charset="-122"/>
+                <a:cs typeface="Calibri" pitchFamily="34" charset="-120"/>
+              </a:rPr>
+              <a:t>популярні </a:t>
+            </a:r>
+            <a:r>
+              <a:rPr lang="en-US" sz="1150" dirty="0">
+                <a:solidFill>
+                  <a:srgbClr val="334155"/>
+                </a:solidFill>
+                <a:latin typeface="Calibri" pitchFamily="34" charset="0"/>
+                <a:ea typeface="Calibri" pitchFamily="34" charset="-122"/>
+                <a:cs typeface="Calibri" pitchFamily="34" charset="-120"/>
+              </a:rPr>
+              <a:t>/ </a:t>
+            </a:r>
+            <a:r>
+              <a:rPr lang="uk-UA" sz="1150" dirty="0">
+                <a:solidFill>
+                  <a:srgbClr val="334155"/>
+                </a:solidFill>
+                <a:latin typeface="Calibri" pitchFamily="34" charset="0"/>
+                <a:ea typeface="Calibri" pitchFamily="34" charset="-122"/>
+                <a:cs typeface="Calibri" pitchFamily="34" charset="-120"/>
+              </a:rPr>
+              <a:t>демографічні.</a:t>
+            </a:r>
+            <a:r>
+              <a:rPr lang="en-US" sz="1150" dirty="0">
+                <a:solidFill>
+                  <a:srgbClr val="334155"/>
+                </a:solidFill>
+                <a:latin typeface="Calibri" pitchFamily="34" charset="0"/>
+                <a:ea typeface="Calibri" pitchFamily="34" charset="-122"/>
+                <a:cs typeface="Calibri" pitchFamily="34" charset="-120"/>
+              </a:rPr>
+              <a:t> </a:t>
+            </a:r>
+            <a:r>
+              <a:rPr lang="uk-UA" sz="1150" dirty="0">
+                <a:solidFill>
+                  <a:srgbClr val="334155"/>
+                </a:solidFill>
+                <a:latin typeface="Calibri" pitchFamily="34" charset="0"/>
+                <a:ea typeface="Calibri" pitchFamily="34" charset="-122"/>
+                <a:cs typeface="Calibri" pitchFamily="34" charset="-120"/>
+              </a:rPr>
+              <a:t>Д</a:t>
+            </a:r>
+            <a:r>
+              <a:rPr lang="en-US" sz="1150" dirty="0" err="1">
+                <a:solidFill>
+                  <a:srgbClr val="334155"/>
+                </a:solidFill>
+                <a:latin typeface="Calibri" pitchFamily="34" charset="0"/>
+                <a:ea typeface="Calibri" pitchFamily="34" charset="-122"/>
+                <a:cs typeface="Calibri" pitchFamily="34" charset="-120"/>
+              </a:rPr>
+              <a:t>освідчений</a:t>
+            </a:r>
+            <a:r>
+              <a:rPr lang="en-US" sz="1150" dirty="0">
+                <a:solidFill>
+                  <a:srgbClr val="334155"/>
+                </a:solidFill>
+                <a:latin typeface="Calibri" pitchFamily="34" charset="0"/>
+                <a:ea typeface="Calibri" pitchFamily="34" charset="-122"/>
+                <a:cs typeface="Calibri" pitchFamily="34" charset="-120"/>
+              </a:rPr>
+              <a:t> </a:t>
+            </a:r>
+            <a:r>
+              <a:rPr lang="uk-UA" sz="1150" dirty="0">
+                <a:solidFill>
+                  <a:srgbClr val="334155"/>
+                </a:solidFill>
+                <a:latin typeface="Calibri" pitchFamily="34" charset="0"/>
+                <a:ea typeface="Calibri" pitchFamily="34" charset="-122"/>
+                <a:cs typeface="Calibri" pitchFamily="34" charset="-120"/>
+              </a:rPr>
+              <a:t>користувач</a:t>
+            </a:r>
+            <a:r>
+              <a:rPr lang="en-US" sz="1150" dirty="0">
+                <a:solidFill>
+                  <a:srgbClr val="334155"/>
+                </a:solidFill>
+                <a:latin typeface="Calibri" pitchFamily="34" charset="0"/>
+                <a:ea typeface="Calibri" pitchFamily="34" charset="-122"/>
+                <a:cs typeface="Calibri" pitchFamily="34" charset="-120"/>
+              </a:rPr>
+              <a:t> → CF або MF. Простота реалізації.</a:t>
             </a:r>
             <a:endParaRPr lang="en-US" sz="1150" dirty="0"/>
           </a:p>
@@ -16878,7 +17131,40 @@
                 <a:ea typeface="Calibri" pitchFamily="34" charset="-122"/>
                 <a:cs typeface="Calibri" pitchFamily="34" charset="-120"/>
               </a:rPr>
-              <a:t>Вихід одного алгоритму стає ознаками для іншого. Наприклад: user embedding від MF → додається до ознак CBF-моделі.</a:t>
+              <a:t>Вихід одного алгоритму стає ознаками для іншого. Наприклад: embedding </a:t>
+            </a:r>
+            <a:r>
+              <a:rPr lang="uk-UA" sz="1150" dirty="0">
+                <a:solidFill>
+                  <a:srgbClr val="334155"/>
+                </a:solidFill>
+                <a:latin typeface="Calibri" pitchFamily="34" charset="0"/>
+                <a:ea typeface="Calibri" pitchFamily="34" charset="-122"/>
+                <a:cs typeface="Calibri" pitchFamily="34" charset="-120"/>
+              </a:rPr>
+              <a:t>користувача </a:t>
+            </a:r>
+            <a:r>
+              <a:rPr lang="en-US" sz="1150" dirty="0" err="1">
+                <a:solidFill>
+                  <a:srgbClr val="334155"/>
+                </a:solidFill>
+                <a:latin typeface="Calibri" pitchFamily="34" charset="0"/>
+                <a:ea typeface="Calibri" pitchFamily="34" charset="-122"/>
+                <a:cs typeface="Calibri" pitchFamily="34" charset="-120"/>
+              </a:rPr>
+              <a:t>від</a:t>
+            </a:r>
+            <a:r>
+              <a:rPr lang="en-US" sz="1150" dirty="0">
+                <a:solidFill>
+                  <a:srgbClr val="334155"/>
+                </a:solidFill>
+                <a:latin typeface="Calibri" pitchFamily="34" charset="0"/>
+                <a:ea typeface="Calibri" pitchFamily="34" charset="-122"/>
+                <a:cs typeface="Calibri" pitchFamily="34" charset="-120"/>
+              </a:rPr>
+              <a:t> MF → додається до ознак CBF-моделі.</a:t>
             </a:r>
             <a:endParaRPr lang="en-US" sz="1150" dirty="0"/>
           </a:p>
@@ -21117,7 +21403,62 @@
                 <a:ea typeface="Calibri" pitchFamily="34" charset="-122"/>
                 <a:cs typeface="Calibri" pitchFamily="34" charset="-120"/>
               </a:rPr>
-              <a:t> при розріджених даних (sparse features) — краще LR </a:t>
+              <a:t> при </a:t>
+            </a:r>
+            <a:r>
+              <a:rPr lang="en-US" sz="1250" dirty="0" err="1">
+                <a:solidFill>
+                  <a:srgbClr val="334155"/>
+                </a:solidFill>
+                <a:latin typeface="Calibri" pitchFamily="34" charset="0"/>
+                <a:ea typeface="Calibri" pitchFamily="34" charset="-122"/>
+                <a:cs typeface="Calibri" pitchFamily="34" charset="-120"/>
+              </a:rPr>
+              <a:t>розріджених</a:t>
+            </a:r>
+            <a:r>
+              <a:rPr lang="en-US" sz="1250" dirty="0">
+                <a:solidFill>
+                  <a:srgbClr val="334155"/>
+                </a:solidFill>
+                <a:latin typeface="Calibri" pitchFamily="34" charset="0"/>
+                <a:ea typeface="Calibri" pitchFamily="34" charset="-122"/>
+                <a:cs typeface="Calibri" pitchFamily="34" charset="-120"/>
+              </a:rPr>
+              <a:t> </a:t>
+            </a:r>
+            <a:r>
+              <a:rPr lang="en-US" sz="1250" dirty="0" err="1">
+                <a:solidFill>
+                  <a:srgbClr val="334155"/>
+                </a:solidFill>
+                <a:latin typeface="Calibri" pitchFamily="34" charset="0"/>
+                <a:ea typeface="Calibri" pitchFamily="34" charset="-122"/>
+                <a:cs typeface="Calibri" pitchFamily="34" charset="-120"/>
+              </a:rPr>
+              <a:t>даних</a:t>
+            </a:r>
+            <a:r>
+              <a:rPr lang="uk-UA" sz="1250" dirty="0">
+                <a:solidFill>
+                  <a:srgbClr val="334155"/>
+                </a:solidFill>
+                <a:latin typeface="Calibri" pitchFamily="34" charset="0"/>
+                <a:ea typeface="Calibri" pitchFamily="34" charset="-122"/>
+                <a:cs typeface="Calibri" pitchFamily="34" charset="-120"/>
+              </a:rPr>
+              <a:t> (ознаках)</a:t>
+            </a:r>
+            <a:r>
+              <a:rPr lang="en-US" sz="1250" dirty="0">
+                <a:solidFill>
+                  <a:srgbClr val="334155"/>
+                </a:solidFill>
+                <a:latin typeface="Calibri" pitchFamily="34" charset="0"/>
+                <a:ea typeface="Calibri" pitchFamily="34" charset="-122"/>
+                <a:cs typeface="Calibri" pitchFamily="34" charset="-120"/>
+              </a:rPr>
+              <a:t> — краще LR </a:t>
             </a:r>
             <a:r>
               <a:rPr lang="en-US" sz="1250" dirty="0" err="1">
@@ -22295,7 +22636,95 @@
                 <a:ea typeface="Calibri" pitchFamily="34" charset="-122"/>
                 <a:cs typeface="Calibri" pitchFamily="34" charset="-120"/>
               </a:rPr>
-              <a:t>Two-stage: DNN candidate generation + DNN ranking. Мільярди відео та users — еталонна промислова архітектура.</a:t>
+              <a:t>Two-stage: DNN </a:t>
+            </a:r>
+            <a:r>
+              <a:rPr lang="uk-UA" sz="1100" dirty="0">
+                <a:solidFill>
+                  <a:srgbClr val="334155"/>
+                </a:solidFill>
+                <a:latin typeface="Calibri" pitchFamily="34" charset="0"/>
+                <a:ea typeface="Calibri" pitchFamily="34" charset="-122"/>
+                <a:cs typeface="Calibri" pitchFamily="34" charset="-120"/>
+              </a:rPr>
+              <a:t>генерування кандидатів</a:t>
+            </a:r>
+            <a:r>
+              <a:rPr lang="en-US" sz="1100" dirty="0">
+                <a:solidFill>
+                  <a:srgbClr val="334155"/>
+                </a:solidFill>
+                <a:latin typeface="Calibri" pitchFamily="34" charset="0"/>
+                <a:ea typeface="Calibri" pitchFamily="34" charset="-122"/>
+                <a:cs typeface="Calibri" pitchFamily="34" charset="-120"/>
+              </a:rPr>
+              <a:t> + DNN </a:t>
+            </a:r>
+            <a:r>
+              <a:rPr lang="uk-UA" sz="1100" dirty="0">
+                <a:solidFill>
+                  <a:srgbClr val="334155"/>
+                </a:solidFill>
+                <a:latin typeface="Calibri" pitchFamily="34" charset="0"/>
+                <a:ea typeface="Calibri" pitchFamily="34" charset="-122"/>
+                <a:cs typeface="Calibri" pitchFamily="34" charset="-120"/>
+              </a:rPr>
+              <a:t>ранжування</a:t>
+            </a:r>
+            <a:r>
+              <a:rPr lang="en-US" sz="1100" dirty="0">
+                <a:solidFill>
+                  <a:srgbClr val="334155"/>
+                </a:solidFill>
+                <a:latin typeface="Calibri" pitchFamily="34" charset="0"/>
+                <a:ea typeface="Calibri" pitchFamily="34" charset="-122"/>
+                <a:cs typeface="Calibri" pitchFamily="34" charset="-120"/>
+              </a:rPr>
+              <a:t>. Мільярди відео </a:t>
+            </a:r>
+            <a:r>
+              <a:rPr lang="en-US" sz="1100" dirty="0" err="1">
+                <a:solidFill>
+                  <a:srgbClr val="334155"/>
+                </a:solidFill>
+                <a:latin typeface="Calibri" pitchFamily="34" charset="0"/>
+                <a:ea typeface="Calibri" pitchFamily="34" charset="-122"/>
+                <a:cs typeface="Calibri" pitchFamily="34" charset="-120"/>
+              </a:rPr>
+              <a:t>та</a:t>
+            </a:r>
+            <a:r>
+              <a:rPr lang="en-US" sz="1100" dirty="0">
+                <a:solidFill>
+                  <a:srgbClr val="334155"/>
+                </a:solidFill>
+                <a:latin typeface="Calibri" pitchFamily="34" charset="0"/>
+                <a:ea typeface="Calibri" pitchFamily="34" charset="-122"/>
+                <a:cs typeface="Calibri" pitchFamily="34" charset="-120"/>
+              </a:rPr>
+              <a:t> </a:t>
+            </a:r>
+            <a:r>
+              <a:rPr lang="uk-UA" sz="1100" dirty="0">
+                <a:solidFill>
+                  <a:srgbClr val="334155"/>
+                </a:solidFill>
+                <a:latin typeface="Calibri" pitchFamily="34" charset="0"/>
+                <a:ea typeface="Calibri" pitchFamily="34" charset="-122"/>
+                <a:cs typeface="Calibri" pitchFamily="34" charset="-120"/>
+              </a:rPr>
+              <a:t>користувачів</a:t>
+            </a:r>
+            <a:r>
+              <a:rPr lang="en-US" sz="1100" dirty="0">
+                <a:solidFill>
+                  <a:srgbClr val="334155"/>
+                </a:solidFill>
+                <a:latin typeface="Calibri" pitchFamily="34" charset="0"/>
+                <a:ea typeface="Calibri" pitchFamily="34" charset="-122"/>
+                <a:cs typeface="Calibri" pitchFamily="34" charset="-120"/>
+              </a:rPr>
+              <a:t> — еталонна промислова архітектура.</a:t>
             </a:r>
             <a:endParaRPr lang="en-US" sz="1100" dirty="0"/>
           </a:p>
@@ -24168,7 +24597,51 @@
                 <a:ea typeface="Calibri" pitchFamily="34" charset="-122"/>
                 <a:cs typeface="Calibri" pitchFamily="34" charset="-120"/>
               </a:rPr>
-              <a:t>: bidirectional self-attention для послідовностей взаємодій — маскування + відновлення елементів</a:t>
+              <a:t>: </a:t>
+            </a:r>
+            <a:r>
+              <a:rPr lang="uk-UA" sz="1200" dirty="0" err="1">
+                <a:solidFill>
+                  <a:srgbClr val="334155"/>
+                </a:solidFill>
+                <a:latin typeface="Calibri" pitchFamily="34" charset="0"/>
+                <a:ea typeface="Calibri" pitchFamily="34" charset="-122"/>
+                <a:cs typeface="Calibri" pitchFamily="34" charset="-120"/>
+              </a:rPr>
+              <a:t>двонаправлений</a:t>
+            </a:r>
+            <a:r>
+              <a:rPr lang="en-US" sz="1200" dirty="0">
+                <a:solidFill>
+                  <a:srgbClr val="334155"/>
+                </a:solidFill>
+                <a:latin typeface="Calibri" pitchFamily="34" charset="0"/>
+                <a:ea typeface="Calibri" pitchFamily="34" charset="-122"/>
+                <a:cs typeface="Calibri" pitchFamily="34" charset="-120"/>
+              </a:rPr>
+              <a:t> </a:t>
+            </a:r>
+            <a:r>
+              <a:rPr lang="uk-UA" sz="1200" dirty="0" err="1">
+                <a:solidFill>
+                  <a:srgbClr val="334155"/>
+                </a:solidFill>
+                <a:latin typeface="Calibri" pitchFamily="34" charset="0"/>
+                <a:ea typeface="Calibri" pitchFamily="34" charset="-122"/>
+                <a:cs typeface="Calibri" pitchFamily="34" charset="-120"/>
+              </a:rPr>
+              <a:t>самоувага</a:t>
+            </a:r>
+            <a:r>
+              <a:rPr lang="en-US" sz="1200" dirty="0">
+                <a:solidFill>
+                  <a:srgbClr val="334155"/>
+                </a:solidFill>
+                <a:latin typeface="Calibri" pitchFamily="34" charset="0"/>
+                <a:ea typeface="Calibri" pitchFamily="34" charset="-122"/>
+                <a:cs typeface="Calibri" pitchFamily="34" charset="-120"/>
+              </a:rPr>
+              <a:t> для послідовностей взаємодій — маскування + відновлення елементів</a:t>
             </a:r>
             <a:endParaRPr lang="en-US" sz="1200" dirty="0"/>
           </a:p>
@@ -24200,7 +24673,51 @@
                 <a:ea typeface="Calibri" pitchFamily="34" charset="-122"/>
                 <a:cs typeface="Calibri" pitchFamily="34" charset="-120"/>
               </a:rPr>
-              <a:t>: однобічна (causal) attention — ефективніша при довгих послідовностях взаємодій</a:t>
+              <a:t>: </a:t>
+            </a:r>
+            <a:r>
+              <a:rPr lang="en-US" sz="1200" dirty="0" err="1">
+                <a:solidFill>
+                  <a:srgbClr val="334155"/>
+                </a:solidFill>
+                <a:latin typeface="Calibri" pitchFamily="34" charset="0"/>
+                <a:ea typeface="Calibri" pitchFamily="34" charset="-122"/>
+                <a:cs typeface="Calibri" pitchFamily="34" charset="-120"/>
+              </a:rPr>
+              <a:t>однобічна</a:t>
+            </a:r>
+            <a:r>
+              <a:rPr lang="en-US" sz="1200" dirty="0">
+                <a:solidFill>
+                  <a:srgbClr val="334155"/>
+                </a:solidFill>
+                <a:latin typeface="Calibri" pitchFamily="34" charset="0"/>
+                <a:ea typeface="Calibri" pitchFamily="34" charset="-122"/>
+                <a:cs typeface="Calibri" pitchFamily="34" charset="-120"/>
+              </a:rPr>
+              <a:t> </a:t>
+            </a:r>
+            <a:r>
+              <a:rPr lang="uk-UA" sz="1200" dirty="0">
+                <a:solidFill>
+                  <a:srgbClr val="334155"/>
+                </a:solidFill>
+                <a:latin typeface="Calibri" pitchFamily="34" charset="0"/>
+                <a:ea typeface="Calibri" pitchFamily="34" charset="-122"/>
+                <a:cs typeface="Calibri" pitchFamily="34" charset="-120"/>
+              </a:rPr>
+              <a:t>увага</a:t>
+            </a:r>
+            <a:r>
+              <a:rPr lang="en-US" sz="1200" dirty="0">
+                <a:solidFill>
+                  <a:srgbClr val="334155"/>
+                </a:solidFill>
+                <a:latin typeface="Calibri" pitchFamily="34" charset="0"/>
+                <a:ea typeface="Calibri" pitchFamily="34" charset="-122"/>
+                <a:cs typeface="Calibri" pitchFamily="34" charset="-120"/>
+              </a:rPr>
+              <a:t>— ефективніша при довгих послідовностях взаємодій</a:t>
             </a:r>
             <a:endParaRPr lang="en-US" sz="1200" dirty="0"/>
           </a:p>
@@ -24734,7 +25251,7 @@
                 <a:ea typeface="Calibri" pitchFamily="34" charset="-122"/>
                 <a:cs typeface="Calibri" pitchFamily="34" charset="-120"/>
               </a:rPr>
-              <a:t>простіший</a:t>
+              <a:t>менш фантастичний</a:t>
             </a:r>
             <a:r>
               <a:rPr lang="en-US" sz="1200" dirty="0">
@@ -24777,7 +25294,7 @@
                 <a:ea typeface="Calibri" pitchFamily="34" charset="-122"/>
                 <a:cs typeface="Calibri" pitchFamily="34" charset="-120"/>
               </a:rPr>
-              <a:t>LLM генерує персоналізоване пояснення чому </a:t>
+              <a:t>LLM генерує персоналізоване пояснення </a:t>
             </a:r>
             <a:r>
               <a:rPr lang="en-US" sz="1200" dirty="0" err="1">
@@ -24788,7 +25305,29 @@
                 <a:ea typeface="Calibri" pitchFamily="34" charset="-122"/>
                 <a:cs typeface="Calibri" pitchFamily="34" charset="-120"/>
               </a:rPr>
-              <a:t>рекомендований</a:t>
+              <a:t>чому</a:t>
+            </a:r>
+            <a:r>
+              <a:rPr lang="en-US" sz="1200" dirty="0">
+                <a:solidFill>
+                  <a:srgbClr val="334155"/>
+                </a:solidFill>
+                <a:latin typeface="Calibri" pitchFamily="34" charset="0"/>
+                <a:ea typeface="Calibri" pitchFamily="34" charset="-122"/>
+                <a:cs typeface="Calibri" pitchFamily="34" charset="-120"/>
+              </a:rPr>
+              <a:t> </a:t>
+            </a:r>
+            <a:r>
+              <a:rPr lang="uk-UA" sz="1200" dirty="0">
+                <a:solidFill>
+                  <a:srgbClr val="334155"/>
+                </a:solidFill>
+                <a:latin typeface="Calibri" pitchFamily="34" charset="0"/>
+                <a:ea typeface="Calibri" pitchFamily="34" charset="-122"/>
+                <a:cs typeface="Calibri" pitchFamily="34" charset="-120"/>
+              </a:rPr>
+              <a:t>рекомендовано</a:t>
             </a:r>
             <a:r>
               <a:rPr lang="en-US" sz="1200" dirty="0">
@@ -28791,7 +29330,7 @@
         </p:nvSpPr>
         <p:spPr>
           <a:xfrm>
-            <a:off x="3608832" y="2650845"/>
+            <a:off x="3608832" y="2613964"/>
             <a:ext cx="457200" cy="365760"/>
           </a:xfrm>
           <a:prstGeom prst="rect">
@@ -28869,7 +29408,7 @@
         </p:nvSpPr>
         <p:spPr>
           <a:xfrm>
-            <a:off x="1005840" y="2575560"/>
+            <a:off x="1005840" y="2669286"/>
             <a:ext cx="457200" cy="365760"/>
           </a:xfrm>
           <a:prstGeom prst="rect">
@@ -29865,6 +30404,17 @@
               <a:buNone/>
             </a:pPr>
             <a:r>
+              <a:rPr lang="en-US" sz="2300" b="1" dirty="0" err="1">
+                <a:solidFill>
+                  <a:srgbClr val="334155"/>
+                </a:solidFill>
+                <a:latin typeface="Calibri" pitchFamily="34" charset="0"/>
+                <a:ea typeface="Calibri" pitchFamily="34" charset="-122"/>
+                <a:cs typeface="Calibri" pitchFamily="34" charset="-120"/>
+              </a:rPr>
+              <a:t>Як</a:t>
+            </a:r>
+            <a:r>
               <a:rPr lang="en-US" sz="2300" b="1" dirty="0">
                 <a:solidFill>
                   <a:srgbClr val="334155"/>
@@ -29873,7 +30423,73 @@
                 <a:ea typeface="Calibri" pitchFamily="34" charset="-122"/>
                 <a:cs typeface="Calibri" pitchFamily="34" charset="-120"/>
               </a:rPr>
-              <a:t>Як Netflix, YouTube, Amazon і Spotify використовують рекомендації</a:t>
+              <a:t> </a:t>
+            </a:r>
+            <a:r>
+              <a:rPr lang="uk-UA" sz="2300" b="1" dirty="0">
+                <a:solidFill>
+                  <a:srgbClr val="334155"/>
+                </a:solidFill>
+                <a:latin typeface="Calibri" pitchFamily="34" charset="0"/>
+                <a:ea typeface="Calibri" pitchFamily="34" charset="-122"/>
+                <a:cs typeface="Calibri" pitchFamily="34" charset="-120"/>
+              </a:rPr>
+              <a:t>відомі компанії</a:t>
+            </a:r>
+            <a:r>
+              <a:rPr lang="en-US" sz="2300" b="1" dirty="0">
+                <a:solidFill>
+                  <a:srgbClr val="334155"/>
+                </a:solidFill>
+                <a:latin typeface="Calibri" pitchFamily="34" charset="0"/>
+                <a:ea typeface="Calibri" pitchFamily="34" charset="-122"/>
+                <a:cs typeface="Calibri" pitchFamily="34" charset="-120"/>
+              </a:rPr>
+              <a:t> </a:t>
+            </a:r>
+            <a:r>
+              <a:rPr lang="en-US" sz="2300" b="1" dirty="0" err="1">
+                <a:solidFill>
+                  <a:srgbClr val="334155"/>
+                </a:solidFill>
+                <a:latin typeface="Calibri" pitchFamily="34" charset="0"/>
+                <a:ea typeface="Calibri" pitchFamily="34" charset="-122"/>
+                <a:cs typeface="Calibri" pitchFamily="34" charset="-120"/>
+              </a:rPr>
+              <a:t>використовують</a:t>
+            </a:r>
+            <a:r>
+              <a:rPr lang="en-US" sz="2300" b="1" dirty="0">
+                <a:solidFill>
+                  <a:srgbClr val="334155"/>
+                </a:solidFill>
+                <a:latin typeface="Calibri" pitchFamily="34" charset="0"/>
+                <a:ea typeface="Calibri" pitchFamily="34" charset="-122"/>
+                <a:cs typeface="Calibri" pitchFamily="34" charset="-120"/>
+              </a:rPr>
+              <a:t> </a:t>
+            </a:r>
+            <a:r>
+              <a:rPr lang="en-US" sz="2300" b="1" dirty="0" err="1">
+                <a:solidFill>
+                  <a:srgbClr val="334155"/>
+                </a:solidFill>
+                <a:latin typeface="Calibri" pitchFamily="34" charset="0"/>
+                <a:ea typeface="Calibri" pitchFamily="34" charset="-122"/>
+                <a:cs typeface="Calibri" pitchFamily="34" charset="-120"/>
+              </a:rPr>
+              <a:t>рекомендації</a:t>
+            </a:r>
+            <a:r>
+              <a:rPr lang="uk-UA" sz="2300" b="1" dirty="0">
+                <a:solidFill>
+                  <a:srgbClr val="334155"/>
+                </a:solidFill>
+                <a:latin typeface="Calibri" pitchFamily="34" charset="0"/>
+                <a:ea typeface="Calibri" pitchFamily="34" charset="-122"/>
+                <a:cs typeface="Calibri" pitchFamily="34" charset="-120"/>
+              </a:rPr>
+              <a:t>?</a:t>
             </a:r>
             <a:endParaRPr lang="en-US" sz="2300" dirty="0"/>
           </a:p>
@@ -30134,18 +30750,7 @@
                 <a:ea typeface="Calibri" pitchFamily="34" charset="-122"/>
                 <a:cs typeface="Calibri" pitchFamily="34" charset="-120"/>
               </a:rPr>
-              <a:t>тестуються на </a:t>
-            </a:r>
-            <a:r>
-              <a:rPr lang="uk-UA" sz="1100" dirty="0" err="1">
-                <a:solidFill>
-                  <a:srgbClr val="334155"/>
-                </a:solidFill>
-                <a:latin typeface="Calibri" pitchFamily="34" charset="0"/>
-                <a:ea typeface="Calibri" pitchFamily="34" charset="-122"/>
-                <a:cs typeface="Calibri" pitchFamily="34" charset="-120"/>
-              </a:rPr>
-              <a:t>корстувачах</a:t>
+              <a:t>тестуються на користувачах</a:t>
             </a:r>
             <a:r>
               <a:rPr lang="en-US" sz="1100" dirty="0">
@@ -30354,6 +30959,17 @@
               <a:buChar char="•"/>
             </a:pPr>
             <a:r>
+              <a:rPr lang="uk-UA" sz="1100" dirty="0" err="1">
+                <a:solidFill>
+                  <a:srgbClr val="334155"/>
+                </a:solidFill>
+                <a:latin typeface="Calibri" pitchFamily="34" charset="0"/>
+                <a:ea typeface="Calibri" pitchFamily="34" charset="-122"/>
+                <a:cs typeface="Calibri" pitchFamily="34" charset="-120"/>
+              </a:rPr>
+              <a:t>Двокрокова</a:t>
+            </a:r>
+            <a:r>
               <a:rPr lang="en-US" sz="1100" dirty="0">
                 <a:solidFill>
                   <a:srgbClr val="334155"/>
@@ -30362,7 +30978,51 @@
                 <a:ea typeface="Calibri" pitchFamily="34" charset="-122"/>
                 <a:cs typeface="Calibri" pitchFamily="34" charset="-120"/>
               </a:rPr>
-              <a:t>Two-stage DNN (2016): candidate gen + ranking DNN</a:t>
+              <a:t> DNN (2016): </a:t>
+            </a:r>
+            <a:r>
+              <a:rPr lang="uk-UA" sz="1100" dirty="0">
+                <a:solidFill>
+                  <a:srgbClr val="334155"/>
+                </a:solidFill>
+                <a:latin typeface="Calibri" pitchFamily="34" charset="0"/>
+                <a:ea typeface="Calibri" pitchFamily="34" charset="-122"/>
+                <a:cs typeface="Calibri" pitchFamily="34" charset="-120"/>
+              </a:rPr>
+              <a:t> генерація</a:t>
+            </a:r>
+            <a:r>
+              <a:rPr lang="en-US" sz="1100" dirty="0">
+                <a:solidFill>
+                  <a:srgbClr val="334155"/>
+                </a:solidFill>
+                <a:latin typeface="Calibri" pitchFamily="34" charset="0"/>
+                <a:ea typeface="Calibri" pitchFamily="34" charset="-122"/>
+                <a:cs typeface="Calibri" pitchFamily="34" charset="-120"/>
+              </a:rPr>
+              <a:t> + </a:t>
+            </a:r>
+            <a:r>
+              <a:rPr lang="uk-UA" sz="1100" dirty="0">
+                <a:solidFill>
+                  <a:srgbClr val="334155"/>
+                </a:solidFill>
+                <a:latin typeface="Calibri" pitchFamily="34" charset="0"/>
+                <a:ea typeface="Calibri" pitchFamily="34" charset="-122"/>
+                <a:cs typeface="Calibri" pitchFamily="34" charset="-120"/>
+              </a:rPr>
+              <a:t>ранжування </a:t>
+            </a:r>
+            <a:r>
+              <a:rPr lang="en-US" sz="1100" dirty="0">
+                <a:solidFill>
+                  <a:srgbClr val="334155"/>
+                </a:solidFill>
+                <a:latin typeface="Calibri" pitchFamily="34" charset="0"/>
+                <a:ea typeface="Calibri" pitchFamily="34" charset="-122"/>
+                <a:cs typeface="Calibri" pitchFamily="34" charset="-120"/>
+              </a:rPr>
+              <a:t>DNN</a:t>
             </a:r>
             <a:endParaRPr lang="en-US" sz="1100" dirty="0"/>
           </a:p>
@@ -30375,6 +31035,17 @@
               <a:buChar char="•"/>
             </a:pPr>
             <a:r>
+              <a:rPr lang="uk-UA" sz="1100" dirty="0">
+                <a:solidFill>
+                  <a:srgbClr val="334155"/>
+                </a:solidFill>
+                <a:latin typeface="Calibri" pitchFamily="34" charset="0"/>
+                <a:ea typeface="Calibri" pitchFamily="34" charset="-122"/>
+                <a:cs typeface="Calibri" pitchFamily="34" charset="-120"/>
+              </a:rPr>
+              <a:t>Час перегляду</a:t>
+            </a:r>
+            <a:r>
               <a:rPr lang="en-US" sz="1100" dirty="0">
                 <a:solidFill>
                   <a:srgbClr val="334155"/>
@@ -30383,7 +31054,51 @@
                 <a:ea typeface="Calibri" pitchFamily="34" charset="-122"/>
                 <a:cs typeface="Calibri" pitchFamily="34" charset="-120"/>
               </a:rPr>
-              <a:t>Watch-time як основна reward-функція (→ </a:t>
+              <a:t> </a:t>
+            </a:r>
+            <a:r>
+              <a:rPr lang="en-US" sz="1100" dirty="0" err="1">
+                <a:solidFill>
+                  <a:srgbClr val="334155"/>
+                </a:solidFill>
+                <a:latin typeface="Calibri" pitchFamily="34" charset="0"/>
+                <a:ea typeface="Calibri" pitchFamily="34" charset="-122"/>
+                <a:cs typeface="Calibri" pitchFamily="34" charset="-120"/>
+              </a:rPr>
+              <a:t>як</a:t>
+            </a:r>
+            <a:r>
+              <a:rPr lang="en-US" sz="1100" dirty="0">
+                <a:solidFill>
+                  <a:srgbClr val="334155"/>
+                </a:solidFill>
+                <a:latin typeface="Calibri" pitchFamily="34" charset="0"/>
+                <a:ea typeface="Calibri" pitchFamily="34" charset="-122"/>
+                <a:cs typeface="Calibri" pitchFamily="34" charset="-120"/>
+              </a:rPr>
+              <a:t> </a:t>
+            </a:r>
+            <a:r>
+              <a:rPr lang="uk-UA" sz="1100" dirty="0">
+                <a:solidFill>
+                  <a:srgbClr val="334155"/>
+                </a:solidFill>
+                <a:latin typeface="Calibri" pitchFamily="34" charset="0"/>
+                <a:ea typeface="Calibri" pitchFamily="34" charset="-122"/>
+                <a:cs typeface="Calibri" pitchFamily="34" charset="-120"/>
+              </a:rPr>
+              <a:t>функція винагороди</a:t>
+            </a:r>
+            <a:r>
+              <a:rPr lang="en-US" sz="1100" dirty="0">
+                <a:solidFill>
+                  <a:srgbClr val="334155"/>
+                </a:solidFill>
+                <a:latin typeface="Calibri" pitchFamily="34" charset="0"/>
+                <a:ea typeface="Calibri" pitchFamily="34" charset="-122"/>
+                <a:cs typeface="Calibri" pitchFamily="34" charset="-120"/>
+              </a:rPr>
+              <a:t> (→ </a:t>
             </a:r>
             <a:r>
               <a:rPr lang="uk-UA" sz="1100" dirty="0">
@@ -30653,7 +31368,7 @@
                 <a:ea typeface="Calibri" pitchFamily="34" charset="-122"/>
                 <a:cs typeface="Calibri" pitchFamily="34" charset="-120"/>
               </a:rPr>
-              <a:t>Швидка персоналізація</a:t>
+              <a:t>Персоналізація в реальному часу</a:t>
             </a:r>
             <a:r>
               <a:rPr lang="en-US" sz="1100" dirty="0">
@@ -34801,6 +35516,17 @@
               <a:buNone/>
             </a:pPr>
             <a:r>
+              <a:rPr lang="en-US" sz="1100" dirty="0" err="1">
+                <a:solidFill>
+                  <a:srgbClr val="334155"/>
+                </a:solidFill>
+                <a:latin typeface="Calibri" pitchFamily="34" charset="0"/>
+                <a:ea typeface="Calibri" pitchFamily="34" charset="-122"/>
+                <a:cs typeface="Calibri" pitchFamily="34" charset="-120"/>
+              </a:rPr>
+              <a:t>Максимізація</a:t>
+            </a:r>
+            <a:r>
               <a:rPr lang="en-US" sz="1100" dirty="0">
                 <a:solidFill>
                   <a:srgbClr val="334155"/>
@@ -34809,7 +35535,29 @@
                 <a:ea typeface="Calibri" pitchFamily="34" charset="-122"/>
                 <a:cs typeface="Calibri" pitchFamily="34" charset="-120"/>
               </a:rPr>
-              <a:t>Максимізація engagement (не добробуту): соцмережі, ігри, відео можуть формувати залежність.</a:t>
+              <a:t> </a:t>
+            </a:r>
+            <a:r>
+              <a:rPr lang="uk-UA" sz="1100" dirty="0">
+                <a:solidFill>
+                  <a:srgbClr val="334155"/>
+                </a:solidFill>
+                <a:latin typeface="Calibri" pitchFamily="34" charset="0"/>
+                <a:ea typeface="Calibri" pitchFamily="34" charset="-122"/>
+                <a:cs typeface="Calibri" pitchFamily="34" charset="-120"/>
+              </a:rPr>
+              <a:t>залученості</a:t>
+            </a:r>
+            <a:r>
+              <a:rPr lang="en-US" sz="1100" dirty="0">
+                <a:solidFill>
+                  <a:srgbClr val="334155"/>
+                </a:solidFill>
+                <a:latin typeface="Calibri" pitchFamily="34" charset="0"/>
+                <a:ea typeface="Calibri" pitchFamily="34" charset="-122"/>
+                <a:cs typeface="Calibri" pitchFamily="34" charset="-120"/>
+              </a:rPr>
+              <a:t> (не добробуту): соцмережі, ігри, відео можуть формувати залежність.</a:t>
             </a:r>
             <a:endParaRPr lang="en-US" sz="1100" dirty="0"/>
           </a:p>
@@ -48300,6 +49048,17 @@
               <a:buNone/>
             </a:pPr>
             <a:r>
+              <a:rPr lang="en-US" sz="950" dirty="0" err="1">
+                <a:solidFill>
+                  <a:srgbClr val="64748B"/>
+                </a:solidFill>
+                <a:latin typeface="Calibri" pitchFamily="34" charset="0"/>
+                <a:ea typeface="Calibri" pitchFamily="34" charset="-122"/>
+                <a:cs typeface="Calibri" pitchFamily="34" charset="-120"/>
+              </a:rPr>
+              <a:t>та</a:t>
+            </a:r>
+            <a:r>
               <a:rPr lang="en-US" sz="950" dirty="0">
                 <a:solidFill>
                   <a:srgbClr val="64748B"/>
@@ -48308,7 +49067,18 @@
                 <a:ea typeface="Calibri" pitchFamily="34" charset="-122"/>
                 <a:cs typeface="Calibri" pitchFamily="34" charset="-120"/>
               </a:rPr>
-              <a:t>та explainable RecSys</a:t>
+              <a:t> </a:t>
+            </a:r>
+            <a:r>
+              <a:rPr lang="uk-UA" sz="950" dirty="0">
+                <a:solidFill>
+                  <a:srgbClr val="64748B"/>
+                </a:solidFill>
+                <a:latin typeface="Calibri" pitchFamily="34" charset="0"/>
+                <a:ea typeface="Calibri" pitchFamily="34" charset="-122"/>
+                <a:cs typeface="Calibri" pitchFamily="34" charset="-120"/>
+              </a:rPr>
+              <a:t>пояснювальні рекомендаційні система</a:t>
             </a:r>
             <a:endParaRPr lang="en-US" sz="950" dirty="0"/>
           </a:p>
@@ -48726,6 +49496,17 @@
               <a:buNone/>
             </a:pPr>
             <a:r>
+              <a:rPr lang="uk-UA" sz="1300" b="1" dirty="0">
+                <a:solidFill>
+                  <a:srgbClr val="FFFFFF"/>
+                </a:solidFill>
+                <a:latin typeface="Calibri" pitchFamily="34" charset="0"/>
+                <a:ea typeface="Calibri" pitchFamily="34" charset="-122"/>
+                <a:cs typeface="Calibri" pitchFamily="34" charset="-120"/>
+              </a:rPr>
+              <a:t>т</a:t>
+            </a:r>
+            <a:r>
               <a:rPr lang="en-US" sz="1300" b="1" dirty="0">
                 <a:solidFill>
                   <a:srgbClr val="FFFFFF"/>
@@ -48734,16 +49515,23 @@
                 <a:ea typeface="Calibri" pitchFamily="34" charset="-122"/>
                 <a:cs typeface="Calibri" pitchFamily="34" charset="-120"/>
               </a:rPr>
-              <a:t>та</a:t>
-            </a:r>
-            <a:endParaRPr lang="en-US" sz="1300" dirty="0"/>
+              <a:t>а</a:t>
+            </a:r>
+            <a:endParaRPr lang="uk-UA" sz="1300" b="1" dirty="0">
+              <a:solidFill>
+                <a:srgbClr val="FFFFFF"/>
+              </a:solidFill>
+              <a:latin typeface="Calibri" pitchFamily="34" charset="0"/>
+              <a:ea typeface="Calibri" pitchFamily="34" charset="-122"/>
+              <a:cs typeface="Calibri" pitchFamily="34" charset="-120"/>
+            </a:endParaRPr>
           </a:p>
           <a:p>
             <a:pPr marL="0" indent="0" algn="ctr">
               <a:buNone/>
             </a:pPr>
             <a:r>
-              <a:rPr lang="en-US" sz="1300" b="1" dirty="0">
+              <a:rPr lang="uk-UA" sz="1300" b="1" dirty="0">
                 <a:solidFill>
                   <a:srgbClr val="FFFFFF"/>
                 </a:solidFill>
@@ -48751,7 +49539,7 @@
                 <a:ea typeface="Calibri" pitchFamily="34" charset="-122"/>
                 <a:cs typeface="Calibri" pitchFamily="34" charset="-120"/>
               </a:rPr>
-              <a:t>features</a:t>
+              <a:t>витягання ознак</a:t>
             </a:r>
             <a:endParaRPr lang="en-US" sz="1300" dirty="0"/>
           </a:p>
@@ -51628,7 +52416,40 @@
                 <a:ea typeface="Calibri" pitchFamily="34" charset="-122"/>
                 <a:cs typeface="Calibri" pitchFamily="34" charset="-120"/>
               </a:rPr>
-              <a:t>Популярні та рекомендації</a:t>
+              <a:t>Популярні </a:t>
+            </a:r>
+            <a:r>
+              <a:rPr lang="uk-UA" sz="2300" b="1" dirty="0">
+                <a:solidFill>
+                  <a:srgbClr val="334155"/>
+                </a:solidFill>
+                <a:latin typeface="Calibri" pitchFamily="34" charset="0"/>
+                <a:ea typeface="Calibri" pitchFamily="34" charset="-122"/>
+                <a:cs typeface="Calibri" pitchFamily="34" charset="-120"/>
+              </a:rPr>
+              <a:t>рекомендації </a:t>
+            </a:r>
+            <a:r>
+              <a:rPr lang="en-US" sz="2300" b="1" dirty="0" err="1">
+                <a:solidFill>
+                  <a:srgbClr val="334155"/>
+                </a:solidFill>
+                <a:latin typeface="Calibri" pitchFamily="34" charset="0"/>
+                <a:ea typeface="Calibri" pitchFamily="34" charset="-122"/>
+                <a:cs typeface="Calibri" pitchFamily="34" charset="-120"/>
+              </a:rPr>
+              <a:t>та</a:t>
+            </a:r>
+            <a:r>
+              <a:rPr lang="en-US" sz="2300" b="1" dirty="0">
+                <a:solidFill>
+                  <a:srgbClr val="334155"/>
+                </a:solidFill>
+                <a:latin typeface="Calibri" pitchFamily="34" charset="0"/>
+                <a:ea typeface="Calibri" pitchFamily="34" charset="-122"/>
+                <a:cs typeface="Calibri" pitchFamily="34" charset="-120"/>
+              </a:rPr>
+              <a:t> рекомендації</a:t>
             </a:r>
             <a:r>
               <a:rPr lang="uk-UA" sz="2300" b="1" dirty="0">
@@ -51846,7 +52667,51 @@
                 <a:ea typeface="Calibri" pitchFamily="34" charset="-122"/>
                 <a:cs typeface="Calibri" pitchFamily="34" charset="-120"/>
               </a:rPr>
-              <a:t>Рекомендують найпопулярніші items однаково для всіх користувачів</a:t>
+              <a:t>Рекомендують </a:t>
+            </a:r>
+            <a:r>
+              <a:rPr lang="en-US" sz="1250" dirty="0" err="1">
+                <a:solidFill>
+                  <a:srgbClr val="334155"/>
+                </a:solidFill>
+                <a:latin typeface="Calibri" pitchFamily="34" charset="0"/>
+                <a:ea typeface="Calibri" pitchFamily="34" charset="-122"/>
+                <a:cs typeface="Calibri" pitchFamily="34" charset="-120"/>
+              </a:rPr>
+              <a:t>найпопулярніші</a:t>
+            </a:r>
+            <a:r>
+              <a:rPr lang="en-US" sz="1250" dirty="0">
+                <a:solidFill>
+                  <a:srgbClr val="334155"/>
+                </a:solidFill>
+                <a:latin typeface="Calibri" pitchFamily="34" charset="0"/>
+                <a:ea typeface="Calibri" pitchFamily="34" charset="-122"/>
+                <a:cs typeface="Calibri" pitchFamily="34" charset="-120"/>
+              </a:rPr>
+              <a:t> </a:t>
+            </a:r>
+            <a:r>
+              <a:rPr lang="uk-UA" sz="1250" dirty="0">
+                <a:solidFill>
+                  <a:srgbClr val="334155"/>
+                </a:solidFill>
+                <a:latin typeface="Calibri" pitchFamily="34" charset="0"/>
+                <a:ea typeface="Calibri" pitchFamily="34" charset="-122"/>
+                <a:cs typeface="Calibri" pitchFamily="34" charset="-120"/>
+              </a:rPr>
+              <a:t>елементи</a:t>
+            </a:r>
+            <a:r>
+              <a:rPr lang="en-US" sz="1250" dirty="0">
+                <a:solidFill>
+                  <a:srgbClr val="334155"/>
+                </a:solidFill>
+                <a:latin typeface="Calibri" pitchFamily="34" charset="0"/>
+                <a:ea typeface="Calibri" pitchFamily="34" charset="-122"/>
+                <a:cs typeface="Calibri" pitchFamily="34" charset="-120"/>
+              </a:rPr>
+              <a:t> однаково для всіх користувачів</a:t>
             </a:r>
             <a:endParaRPr lang="en-US" sz="1250" dirty="0"/>
           </a:p>
@@ -53480,7 +54345,7 @@
               <a:buNone/>
             </a:pPr>
             <a:r>
-              <a:rPr lang="en-US" sz="1200" b="1" dirty="0">
+              <a:rPr lang="uk-UA" sz="1200" b="1" dirty="0" err="1">
                 <a:solidFill>
                   <a:srgbClr val="FFFFFF"/>
                 </a:solidFill>
@@ -53488,7 +54353,18 @@
                 <a:ea typeface="Calibri" pitchFamily="34" charset="-122"/>
                 <a:cs typeface="Calibri" pitchFamily="34" charset="-120"/>
               </a:rPr>
-              <a:t>Cosine similarity</a:t>
+              <a:t>Косунус</a:t>
+            </a:r>
+            <a:r>
+              <a:rPr lang="uk-UA" sz="1200" b="1" dirty="0">
+                <a:solidFill>
+                  <a:srgbClr val="FFFFFF"/>
+                </a:solidFill>
+                <a:latin typeface="Calibri" pitchFamily="34" charset="0"/>
+                <a:ea typeface="Calibri" pitchFamily="34" charset="-122"/>
+                <a:cs typeface="Calibri" pitchFamily="34" charset="-120"/>
+              </a:rPr>
+              <a:t> подібності</a:t>
             </a:r>
             <a:endParaRPr lang="en-US" sz="1200" dirty="0"/>
           </a:p>
@@ -53716,7 +54592,40 @@
                 <a:ea typeface="Calibri" pitchFamily="34" charset="-122"/>
                 <a:cs typeface="Calibri" pitchFamily="34" charset="-120"/>
               </a:rPr>
-              <a:t>Ефективний при невеликій кількості users</a:t>
+              <a:t>Ефективний при невеликій </a:t>
+            </a:r>
+            <a:r>
+              <a:rPr lang="en-US" sz="1250" dirty="0" err="1">
+                <a:solidFill>
+                  <a:srgbClr val="334155"/>
+                </a:solidFill>
+                <a:latin typeface="Calibri" pitchFamily="34" charset="0"/>
+                <a:ea typeface="Calibri" pitchFamily="34" charset="-122"/>
+                <a:cs typeface="Calibri" pitchFamily="34" charset="-120"/>
+              </a:rPr>
+              <a:t>кількості</a:t>
+            </a:r>
+            <a:r>
+              <a:rPr lang="en-US" sz="1250" dirty="0">
+                <a:solidFill>
+                  <a:srgbClr val="334155"/>
+                </a:solidFill>
+                <a:latin typeface="Calibri" pitchFamily="34" charset="0"/>
+                <a:ea typeface="Calibri" pitchFamily="34" charset="-122"/>
+                <a:cs typeface="Calibri" pitchFamily="34" charset="-120"/>
+              </a:rPr>
+              <a:t> </a:t>
+            </a:r>
+            <a:r>
+              <a:rPr lang="uk-UA" sz="1250" dirty="0">
+                <a:solidFill>
+                  <a:srgbClr val="334155"/>
+                </a:solidFill>
+                <a:latin typeface="Calibri" pitchFamily="34" charset="0"/>
+                <a:ea typeface="Calibri" pitchFamily="34" charset="-122"/>
+                <a:cs typeface="Calibri" pitchFamily="34" charset="-120"/>
+              </a:rPr>
+              <a:t>користувачів</a:t>
             </a:r>
             <a:endParaRPr lang="en-US" sz="1250" dirty="0"/>
           </a:p>

--- a/docs/Presentation - Recommendation Systems. Theoretical Approaches.pptx
+++ b/docs/Presentation - Recommendation Systems. Theoretical Approaches.pptx
@@ -1715,8 +1715,8 @@
               <a:t> </a:t>
             </a:r>
             <a:r>
-              <a:rPr lang="uk-UA" dirty="0" err="1"/>
-              <a:t>користуваче</a:t>
+              <a:rPr lang="uk-UA" dirty="0"/>
+              <a:t>користувачем</a:t>
             </a:r>
             <a:r>
               <a:rPr lang="en-US" dirty="0"/>
@@ -2221,8 +2221,8 @@
               <a:t> та </a:t>
             </a:r>
             <a:r>
-              <a:rPr lang="uk-UA" noProof="0" dirty="0" err="1"/>
-              <a:t>Twitter</a:t>
+              <a:rPr lang="en-US" noProof="0" dirty="0"/>
+              <a:t>X</a:t>
             </a:r>
             <a:r>
               <a:rPr lang="uk-UA" noProof="0" dirty="0"/>
@@ -5767,7 +5767,7 @@
           <a:p>
             <a:r>
               <a:rPr lang="uk-UA" b="1" dirty="0"/>
-              <a:t>Доцільно, мабуть, почати з </a:t>
+              <a:t>Мабуть, почнемо з </a:t>
             </a:r>
             <a:r>
               <a:rPr lang="uk-UA" b="1" dirty="0" err="1"/>
@@ -6463,15 +6463,7 @@
             </a:r>
             <a:r>
               <a:rPr lang="uk-UA" noProof="0" dirty="0"/>
-              <a:t>— генерація рекомендацій. Досить </a:t>
-            </a:r>
-            <a:r>
-              <a:rPr lang="uk-UA" noProof="0" dirty="0" err="1"/>
-              <a:t>частом</a:t>
-            </a:r>
-            <a:r>
-              <a:rPr lang="uk-UA" noProof="0" dirty="0"/>
-              <a:t> використовується </a:t>
+              <a:t>— генерація рекомендацій. Досить часто використовується </a:t>
             </a:r>
             <a:r>
               <a:rPr lang="uk-UA" noProof="0" dirty="0" err="1"/>
@@ -7339,7 +7331,7 @@
           <a:p>
             <a:fld id="{C764DE79-268F-4C1A-8933-263129D2AF90}" type="datetimeFigureOut">
               <a:rPr lang="en-US" smtClean="0"/>
-              <a:t>5/6/2026</a:t>
+              <a:t>5/7/2026</a:t>
             </a:fld>
             <a:endParaRPr lang="en-US" dirty="0"/>
           </a:p>
@@ -7381,7 +7373,7 @@
           <a:p>
             <a:fld id="{48F63A3B-78C7-47BE-AE5E-E10140E04643}" type="slidenum">
               <a:rPr lang="en-US" smtClean="0"/>
-              <a:t>‹№›</a:t>
+              <a:t>‹#›</a:t>
             </a:fld>
             <a:endParaRPr lang="en-US" dirty="0"/>
           </a:p>
@@ -7510,7 +7502,7 @@
           <a:p>
             <a:fld id="{C764DE79-268F-4C1A-8933-263129D2AF90}" type="datetimeFigureOut">
               <a:rPr lang="en-US" smtClean="0"/>
-              <a:t>5/6/2026</a:t>
+              <a:t>5/7/2026</a:t>
             </a:fld>
             <a:endParaRPr lang="en-US" dirty="0"/>
           </a:p>
@@ -7552,7 +7544,7 @@
           <a:p>
             <a:fld id="{48F63A3B-78C7-47BE-AE5E-E10140E04643}" type="slidenum">
               <a:rPr lang="en-US" smtClean="0"/>
-              <a:t>‹№›</a:t>
+              <a:t>‹#›</a:t>
             </a:fld>
             <a:endParaRPr lang="en-US" dirty="0"/>
           </a:p>
@@ -7691,7 +7683,7 @@
           <a:p>
             <a:fld id="{C764DE79-268F-4C1A-8933-263129D2AF90}" type="datetimeFigureOut">
               <a:rPr lang="en-US" smtClean="0"/>
-              <a:t>5/6/2026</a:t>
+              <a:t>5/7/2026</a:t>
             </a:fld>
             <a:endParaRPr lang="en-US" dirty="0"/>
           </a:p>
@@ -7733,7 +7725,7 @@
           <a:p>
             <a:fld id="{48F63A3B-78C7-47BE-AE5E-E10140E04643}" type="slidenum">
               <a:rPr lang="en-US" smtClean="0"/>
-              <a:t>‹№›</a:t>
+              <a:t>‹#›</a:t>
             </a:fld>
             <a:endParaRPr lang="en-US" dirty="0"/>
           </a:p>
@@ -7897,7 +7889,7 @@
           <a:p>
             <a:fld id="{C764DE79-268F-4C1A-8933-263129D2AF90}" type="datetimeFigureOut">
               <a:rPr lang="en-US" smtClean="0"/>
-              <a:t>5/6/2026</a:t>
+              <a:t>5/7/2026</a:t>
             </a:fld>
             <a:endParaRPr lang="en-US" dirty="0"/>
           </a:p>
@@ -7939,7 +7931,7 @@
           <a:p>
             <a:fld id="{48F63A3B-78C7-47BE-AE5E-E10140E04643}" type="slidenum">
               <a:rPr lang="en-US" smtClean="0"/>
-              <a:t>‹№›</a:t>
+              <a:t>‹#›</a:t>
             </a:fld>
             <a:endParaRPr lang="en-US" dirty="0"/>
           </a:p>
@@ -8144,7 +8136,7 @@
           <a:p>
             <a:fld id="{C764DE79-268F-4C1A-8933-263129D2AF90}" type="datetimeFigureOut">
               <a:rPr lang="en-US" smtClean="0"/>
-              <a:t>5/6/2026</a:t>
+              <a:t>5/7/2026</a:t>
             </a:fld>
             <a:endParaRPr lang="en-US" dirty="0"/>
           </a:p>
@@ -8186,7 +8178,7 @@
           <a:p>
             <a:fld id="{48F63A3B-78C7-47BE-AE5E-E10140E04643}" type="slidenum">
               <a:rPr lang="en-US" smtClean="0"/>
-              <a:t>‹№›</a:t>
+              <a:t>‹#›</a:t>
             </a:fld>
             <a:endParaRPr lang="en-US" dirty="0"/>
           </a:p>
@@ -8377,7 +8369,7 @@
           <a:p>
             <a:fld id="{C764DE79-268F-4C1A-8933-263129D2AF90}" type="datetimeFigureOut">
               <a:rPr lang="en-US" smtClean="0"/>
-              <a:t>5/6/2026</a:t>
+              <a:t>5/7/2026</a:t>
             </a:fld>
             <a:endParaRPr lang="en-US" dirty="0"/>
           </a:p>
@@ -8419,7 +8411,7 @@
           <a:p>
             <a:fld id="{48F63A3B-78C7-47BE-AE5E-E10140E04643}" type="slidenum">
               <a:rPr lang="en-US" smtClean="0"/>
-              <a:t>‹№›</a:t>
+              <a:t>‹#›</a:t>
             </a:fld>
             <a:endParaRPr lang="en-US" dirty="0"/>
           </a:p>
@@ -8745,7 +8737,7 @@
           <a:p>
             <a:fld id="{C764DE79-268F-4C1A-8933-263129D2AF90}" type="datetimeFigureOut">
               <a:rPr lang="en-US" smtClean="0"/>
-              <a:t>5/6/2026</a:t>
+              <a:t>5/7/2026</a:t>
             </a:fld>
             <a:endParaRPr lang="en-US" dirty="0"/>
           </a:p>
@@ -8787,7 +8779,7 @@
           <a:p>
             <a:fld id="{48F63A3B-78C7-47BE-AE5E-E10140E04643}" type="slidenum">
               <a:rPr lang="en-US" smtClean="0"/>
-              <a:t>‹№›</a:t>
+              <a:t>‹#›</a:t>
             </a:fld>
             <a:endParaRPr lang="en-US" dirty="0"/>
           </a:p>
@@ -8864,7 +8856,7 @@
           <a:p>
             <a:fld id="{C764DE79-268F-4C1A-8933-263129D2AF90}" type="datetimeFigureOut">
               <a:rPr lang="en-US" smtClean="0"/>
-              <a:t>5/6/2026</a:t>
+              <a:t>5/7/2026</a:t>
             </a:fld>
             <a:endParaRPr lang="en-US" dirty="0"/>
           </a:p>
@@ -8906,7 +8898,7 @@
           <a:p>
             <a:fld id="{48F63A3B-78C7-47BE-AE5E-E10140E04643}" type="slidenum">
               <a:rPr lang="en-US" smtClean="0"/>
-              <a:t>‹№›</a:t>
+              <a:t>‹#›</a:t>
             </a:fld>
             <a:endParaRPr lang="en-US" dirty="0"/>
           </a:p>
@@ -8960,7 +8952,7 @@
           <a:p>
             <a:fld id="{C764DE79-268F-4C1A-8933-263129D2AF90}" type="datetimeFigureOut">
               <a:rPr lang="en-US" smtClean="0"/>
-              <a:t>5/6/2026</a:t>
+              <a:t>5/7/2026</a:t>
             </a:fld>
             <a:endParaRPr lang="en-US" dirty="0"/>
           </a:p>
@@ -9002,7 +8994,7 @@
           <a:p>
             <a:fld id="{48F63A3B-78C7-47BE-AE5E-E10140E04643}" type="slidenum">
               <a:rPr lang="en-US" smtClean="0"/>
-              <a:t>‹№›</a:t>
+              <a:t>‹#›</a:t>
             </a:fld>
             <a:endParaRPr lang="en-US" dirty="0"/>
           </a:p>
@@ -9238,7 +9230,7 @@
           <a:p>
             <a:fld id="{C764DE79-268F-4C1A-8933-263129D2AF90}" type="datetimeFigureOut">
               <a:rPr lang="en-US" smtClean="0"/>
-              <a:t>5/6/2026</a:t>
+              <a:t>5/7/2026</a:t>
             </a:fld>
             <a:endParaRPr lang="en-US" dirty="0"/>
           </a:p>
@@ -9280,7 +9272,7 @@
           <a:p>
             <a:fld id="{48F63A3B-78C7-47BE-AE5E-E10140E04643}" type="slidenum">
               <a:rPr lang="en-US" smtClean="0"/>
-              <a:t>‹№›</a:t>
+              <a:t>‹#›</a:t>
             </a:fld>
             <a:endParaRPr lang="en-US" dirty="0"/>
           </a:p>
@@ -9496,7 +9488,7 @@
           <a:p>
             <a:fld id="{C764DE79-268F-4C1A-8933-263129D2AF90}" type="datetimeFigureOut">
               <a:rPr lang="en-US" smtClean="0"/>
-              <a:t>5/6/2026</a:t>
+              <a:t>5/7/2026</a:t>
             </a:fld>
             <a:endParaRPr lang="en-US" dirty="0"/>
           </a:p>
@@ -9538,7 +9530,7 @@
           <a:p>
             <a:fld id="{48F63A3B-78C7-47BE-AE5E-E10140E04643}" type="slidenum">
               <a:rPr lang="en-US" smtClean="0"/>
-              <a:t>‹№›</a:t>
+              <a:t>‹#›</a:t>
             </a:fld>
             <a:endParaRPr lang="en-US" dirty="0"/>
           </a:p>
@@ -9710,7 +9702,7 @@
           <a:p>
             <a:fld id="{C764DE79-268F-4C1A-8933-263129D2AF90}" type="datetimeFigureOut">
               <a:rPr lang="en-US" smtClean="0"/>
-              <a:t>5/6/2026</a:t>
+              <a:t>5/7/2026</a:t>
             </a:fld>
             <a:endParaRPr lang="en-US" dirty="0"/>
           </a:p>
@@ -9788,7 +9780,7 @@
           <a:p>
             <a:fld id="{48F63A3B-78C7-47BE-AE5E-E10140E04643}" type="slidenum">
               <a:rPr lang="en-US" smtClean="0"/>
-              <a:t>‹№›</a:t>
+              <a:t>‹#›</a:t>
             </a:fld>
             <a:endParaRPr lang="en-US" dirty="0"/>
           </a:p>
@@ -15137,8 +15129,8 @@
         </p:nvSpPr>
         <p:spPr>
           <a:xfrm>
-            <a:off x="5943600" y="1316736"/>
-            <a:ext cx="2651760" cy="1042416"/>
+            <a:off x="5471160" y="1316736"/>
+            <a:ext cx="3124200" cy="1042416"/>
           </a:xfrm>
           <a:prstGeom prst="rect">
             <a:avLst/>
@@ -15183,7 +15175,51 @@
                 <a:ea typeface="Calibri" pitchFamily="34" charset="-122"/>
                 <a:cs typeface="Calibri" pitchFamily="34" charset="-120"/>
               </a:rPr>
-              <a:t>P — матриця users (m × k)</a:t>
+              <a:t>P — </a:t>
+            </a:r>
+            <a:r>
+              <a:rPr lang="en-US" sz="1400" dirty="0" err="1">
+                <a:solidFill>
+                  <a:schemeClr val="bg1"/>
+                </a:solidFill>
+                <a:latin typeface="Calibri" pitchFamily="34" charset="0"/>
+                <a:ea typeface="Calibri" pitchFamily="34" charset="-122"/>
+                <a:cs typeface="Calibri" pitchFamily="34" charset="-120"/>
+              </a:rPr>
+              <a:t>матриця</a:t>
+            </a:r>
+            <a:r>
+              <a:rPr lang="en-US" sz="1400" dirty="0">
+                <a:solidFill>
+                  <a:schemeClr val="bg1"/>
+                </a:solidFill>
+                <a:latin typeface="Calibri" pitchFamily="34" charset="0"/>
+                <a:ea typeface="Calibri" pitchFamily="34" charset="-122"/>
+                <a:cs typeface="Calibri" pitchFamily="34" charset="-120"/>
+              </a:rPr>
+              <a:t> </a:t>
+            </a:r>
+            <a:r>
+              <a:rPr lang="uk-UA" sz="1400" dirty="0">
+                <a:solidFill>
+                  <a:schemeClr val="bg1"/>
+                </a:solidFill>
+                <a:latin typeface="Calibri" pitchFamily="34" charset="0"/>
+                <a:ea typeface="Calibri" pitchFamily="34" charset="-122"/>
+                <a:cs typeface="Calibri" pitchFamily="34" charset="-120"/>
+              </a:rPr>
+              <a:t>користувачів</a:t>
+            </a:r>
+            <a:r>
+              <a:rPr lang="en-US" sz="1400" dirty="0">
+                <a:solidFill>
+                  <a:schemeClr val="bg1"/>
+                </a:solidFill>
+                <a:latin typeface="Calibri" pitchFamily="34" charset="0"/>
+                <a:ea typeface="Calibri" pitchFamily="34" charset="-122"/>
+                <a:cs typeface="Calibri" pitchFamily="34" charset="-120"/>
+              </a:rPr>
+              <a:t> (m × k)</a:t>
             </a:r>
             <a:endParaRPr lang="en-US" sz="1400" dirty="0">
               <a:solidFill>
@@ -15204,7 +15240,51 @@
                 <a:ea typeface="Calibri" pitchFamily="34" charset="-122"/>
                 <a:cs typeface="Calibri" pitchFamily="34" charset="-120"/>
               </a:rPr>
-              <a:t>Q — матриця items (n × k)</a:t>
+              <a:t>Q — </a:t>
+            </a:r>
+            <a:r>
+              <a:rPr lang="en-US" sz="1400" dirty="0" err="1">
+                <a:solidFill>
+                  <a:schemeClr val="bg1"/>
+                </a:solidFill>
+                <a:latin typeface="Calibri" pitchFamily="34" charset="0"/>
+                <a:ea typeface="Calibri" pitchFamily="34" charset="-122"/>
+                <a:cs typeface="Calibri" pitchFamily="34" charset="-120"/>
+              </a:rPr>
+              <a:t>матриця</a:t>
+            </a:r>
+            <a:r>
+              <a:rPr lang="en-US" sz="1400" dirty="0">
+                <a:solidFill>
+                  <a:schemeClr val="bg1"/>
+                </a:solidFill>
+                <a:latin typeface="Calibri" pitchFamily="34" charset="0"/>
+                <a:ea typeface="Calibri" pitchFamily="34" charset="-122"/>
+                <a:cs typeface="Calibri" pitchFamily="34" charset="-120"/>
+              </a:rPr>
+              <a:t> </a:t>
+            </a:r>
+            <a:r>
+              <a:rPr lang="uk-UA" sz="1400" dirty="0">
+                <a:solidFill>
+                  <a:schemeClr val="bg1"/>
+                </a:solidFill>
+                <a:latin typeface="Calibri" pitchFamily="34" charset="0"/>
+                <a:ea typeface="Calibri" pitchFamily="34" charset="-122"/>
+                <a:cs typeface="Calibri" pitchFamily="34" charset="-120"/>
+              </a:rPr>
+              <a:t>елементів</a:t>
+            </a:r>
+            <a:r>
+              <a:rPr lang="en-US" sz="1400" dirty="0">
+                <a:solidFill>
+                  <a:schemeClr val="bg1"/>
+                </a:solidFill>
+                <a:latin typeface="Calibri" pitchFamily="34" charset="0"/>
+                <a:ea typeface="Calibri" pitchFamily="34" charset="-122"/>
+                <a:cs typeface="Calibri" pitchFamily="34" charset="-120"/>
+              </a:rPr>
+              <a:t> (n × k)</a:t>
             </a:r>
             <a:endParaRPr lang="en-US" sz="1400" dirty="0">
               <a:solidFill>
@@ -15225,7 +15305,40 @@
                 <a:ea typeface="Calibri" pitchFamily="34" charset="-122"/>
                 <a:cs typeface="Calibri" pitchFamily="34" charset="-120"/>
               </a:rPr>
-              <a:t>k — кількість latent factors</a:t>
+              <a:t>k — </a:t>
+            </a:r>
+            <a:r>
+              <a:rPr lang="en-US" sz="1400" dirty="0" err="1">
+                <a:solidFill>
+                  <a:schemeClr val="bg1"/>
+                </a:solidFill>
+                <a:latin typeface="Calibri" pitchFamily="34" charset="0"/>
+                <a:ea typeface="Calibri" pitchFamily="34" charset="-122"/>
+                <a:cs typeface="Calibri" pitchFamily="34" charset="-120"/>
+              </a:rPr>
+              <a:t>кількість</a:t>
+            </a:r>
+            <a:r>
+              <a:rPr lang="en-US" sz="1400" dirty="0">
+                <a:solidFill>
+                  <a:schemeClr val="bg1"/>
+                </a:solidFill>
+                <a:latin typeface="Calibri" pitchFamily="34" charset="0"/>
+                <a:ea typeface="Calibri" pitchFamily="34" charset="-122"/>
+                <a:cs typeface="Calibri" pitchFamily="34" charset="-120"/>
+              </a:rPr>
+              <a:t> </a:t>
+            </a:r>
+            <a:r>
+              <a:rPr lang="uk-UA" sz="1400" dirty="0">
+                <a:solidFill>
+                  <a:schemeClr val="bg1"/>
+                </a:solidFill>
+                <a:latin typeface="Calibri" pitchFamily="34" charset="0"/>
+                <a:ea typeface="Calibri" pitchFamily="34" charset="-122"/>
+                <a:cs typeface="Calibri" pitchFamily="34" charset="-120"/>
+              </a:rPr>
+              <a:t>факторів</a:t>
             </a:r>
             <a:endParaRPr lang="en-US" sz="1400" dirty="0">
               <a:solidFill>
@@ -19751,7 +19864,29 @@
                 <a:ea typeface="Calibri" pitchFamily="34" charset="-122"/>
                 <a:cs typeface="Calibri" pitchFamily="34" charset="-120"/>
               </a:rPr>
-              <a:t>ML підходи в industry:</a:t>
+              <a:t>ML підходи в </a:t>
+            </a:r>
+            <a:r>
+              <a:rPr lang="uk-UA" sz="1300" b="1" dirty="0">
+                <a:solidFill>
+                  <a:srgbClr val="0D9488"/>
+                </a:solidFill>
+                <a:latin typeface="Calibri" pitchFamily="34" charset="0"/>
+                <a:ea typeface="Calibri" pitchFamily="34" charset="-122"/>
+                <a:cs typeface="Calibri" pitchFamily="34" charset="-120"/>
+              </a:rPr>
+              <a:t>індустрії</a:t>
+            </a:r>
+            <a:r>
+              <a:rPr lang="en-US" sz="1300" b="1" dirty="0">
+                <a:solidFill>
+                  <a:srgbClr val="0D9488"/>
+                </a:solidFill>
+                <a:latin typeface="Calibri" pitchFamily="34" charset="0"/>
+                <a:ea typeface="Calibri" pitchFamily="34" charset="-122"/>
+                <a:cs typeface="Calibri" pitchFamily="34" charset="-120"/>
+              </a:rPr>
+              <a:t>:</a:t>
             </a:r>
             <a:endParaRPr lang="en-US" sz="1300" dirty="0"/>
           </a:p>
@@ -21175,7 +21310,7 @@
                 <a:ea typeface="Calibri" pitchFamily="34" charset="-122"/>
                 <a:cs typeface="Calibri" pitchFamily="34" charset="-120"/>
               </a:rPr>
-              <a:t>пошук Google/Bing, рекомендації LinkedIn, Twitter</a:t>
+              <a:t>пошук Google/Bing, рекомендації LinkedIn, X</a:t>
             </a:r>
             <a:endParaRPr lang="en-US" sz="1250" dirty="0"/>
           </a:p>
@@ -23852,7 +23987,40 @@
                 <a:ea typeface="Calibri" pitchFamily="34" charset="-122"/>
                 <a:cs typeface="Calibri" pitchFamily="34" charset="-120"/>
               </a:rPr>
-              <a:t>: механізм уваги вибирає важливі попередні items</a:t>
+              <a:t>: механізм уваги вибирає важливі </a:t>
+            </a:r>
+            <a:r>
+              <a:rPr lang="en-US" sz="1050" dirty="0" err="1">
+                <a:solidFill>
+                  <a:srgbClr val="334155"/>
+                </a:solidFill>
+                <a:latin typeface="Calibri" pitchFamily="34" charset="0"/>
+                <a:ea typeface="Calibri" pitchFamily="34" charset="-122"/>
+                <a:cs typeface="Calibri" pitchFamily="34" charset="-120"/>
+              </a:rPr>
+              <a:t>попередні</a:t>
+            </a:r>
+            <a:r>
+              <a:rPr lang="en-US" sz="1050" dirty="0">
+                <a:solidFill>
+                  <a:srgbClr val="334155"/>
+                </a:solidFill>
+                <a:latin typeface="Calibri" pitchFamily="34" charset="0"/>
+                <a:ea typeface="Calibri" pitchFamily="34" charset="-122"/>
+                <a:cs typeface="Calibri" pitchFamily="34" charset="-120"/>
+              </a:rPr>
+              <a:t> </a:t>
+            </a:r>
+            <a:r>
+              <a:rPr lang="uk-UA" sz="1050" dirty="0">
+                <a:solidFill>
+                  <a:srgbClr val="334155"/>
+                </a:solidFill>
+                <a:latin typeface="Calibri" pitchFamily="34" charset="0"/>
+                <a:ea typeface="Calibri" pitchFamily="34" charset="-122"/>
+                <a:cs typeface="Calibri" pitchFamily="34" charset="-120"/>
+              </a:rPr>
+              <a:t>елементи</a:t>
             </a:r>
             <a:endParaRPr lang="en-US" sz="1050" dirty="0"/>
           </a:p>
@@ -44020,7 +44188,51 @@
                 <a:ea typeface="Calibri" pitchFamily="34" charset="-122"/>
                 <a:cs typeface="Calibri" pitchFamily="34" charset="-120"/>
               </a:rPr>
-              <a:t>Precision@k — частка релевантних items серед перших k рекомендацій, незалежно від позиції</a:t>
+              <a:t>Precision@k — частка </a:t>
+            </a:r>
+            <a:r>
+              <a:rPr lang="en-US" sz="1300" dirty="0" err="1">
+                <a:solidFill>
+                  <a:srgbClr val="334155"/>
+                </a:solidFill>
+                <a:latin typeface="Calibri" pitchFamily="34" charset="0"/>
+                <a:ea typeface="Calibri" pitchFamily="34" charset="-122"/>
+                <a:cs typeface="Calibri" pitchFamily="34" charset="-120"/>
+              </a:rPr>
+              <a:t>релевантних</a:t>
+            </a:r>
+            <a:r>
+              <a:rPr lang="en-US" sz="1300" dirty="0">
+                <a:solidFill>
+                  <a:srgbClr val="334155"/>
+                </a:solidFill>
+                <a:latin typeface="Calibri" pitchFamily="34" charset="0"/>
+                <a:ea typeface="Calibri" pitchFamily="34" charset="-122"/>
+                <a:cs typeface="Calibri" pitchFamily="34" charset="-120"/>
+              </a:rPr>
+              <a:t> </a:t>
+            </a:r>
+            <a:r>
+              <a:rPr lang="uk-UA" sz="1300" dirty="0">
+                <a:solidFill>
+                  <a:srgbClr val="334155"/>
+                </a:solidFill>
+                <a:latin typeface="Calibri" pitchFamily="34" charset="0"/>
+                <a:ea typeface="Calibri" pitchFamily="34" charset="-122"/>
+                <a:cs typeface="Calibri" pitchFamily="34" charset="-120"/>
+              </a:rPr>
+              <a:t>елементів</a:t>
+            </a:r>
+            <a:r>
+              <a:rPr lang="en-US" sz="1300" dirty="0">
+                <a:solidFill>
+                  <a:srgbClr val="334155"/>
+                </a:solidFill>
+                <a:latin typeface="Calibri" pitchFamily="34" charset="0"/>
+                <a:ea typeface="Calibri" pitchFamily="34" charset="-122"/>
+                <a:cs typeface="Calibri" pitchFamily="34" charset="-120"/>
+              </a:rPr>
+              <a:t> серед перших k рекомендацій, незалежно від позиції</a:t>
             </a:r>
             <a:endParaRPr lang="en-US" sz="1300" dirty="0"/>
           </a:p>
@@ -44196,9 +44408,6 @@
           <a:bodyPr wrap="square" rtlCol="0" anchor="ctr"/>
           <a:lstStyle/>
           <a:p>
-            <a:pPr marL="0" indent="0">
-              <a:buNone/>
-            </a:pPr>
             <a:r>
               <a:rPr lang="en-US" sz="1300" dirty="0">
                 <a:solidFill>
@@ -44208,7 +44417,51 @@
                 <a:ea typeface="Calibri" pitchFamily="34" charset="-122"/>
                 <a:cs typeface="Calibri" pitchFamily="34" charset="-120"/>
               </a:rPr>
-              <a:t>Recall@k — частка знайдених релевантних items від загальної їх кількості у каталозі</a:t>
+              <a:t>Recall@k — частка знайдених </a:t>
+            </a:r>
+            <a:r>
+              <a:rPr lang="en-US" sz="1300" dirty="0" err="1">
+                <a:solidFill>
+                  <a:srgbClr val="334155"/>
+                </a:solidFill>
+                <a:latin typeface="Calibri" pitchFamily="34" charset="0"/>
+                <a:ea typeface="Calibri" pitchFamily="34" charset="-122"/>
+                <a:cs typeface="Calibri" pitchFamily="34" charset="-120"/>
+              </a:rPr>
+              <a:t>релевантних</a:t>
+            </a:r>
+            <a:r>
+              <a:rPr lang="en-US" sz="1300" dirty="0">
+                <a:solidFill>
+                  <a:srgbClr val="334155"/>
+                </a:solidFill>
+                <a:latin typeface="Calibri" pitchFamily="34" charset="0"/>
+                <a:ea typeface="Calibri" pitchFamily="34" charset="-122"/>
+                <a:cs typeface="Calibri" pitchFamily="34" charset="-120"/>
+              </a:rPr>
+              <a:t> </a:t>
+            </a:r>
+            <a:r>
+              <a:rPr lang="uk-UA" sz="1300" dirty="0">
+                <a:solidFill>
+                  <a:srgbClr val="334155"/>
+                </a:solidFill>
+                <a:latin typeface="Calibri" pitchFamily="34" charset="0"/>
+                <a:ea typeface="Calibri" pitchFamily="34" charset="-122"/>
+                <a:cs typeface="Calibri" pitchFamily="34" charset="-120"/>
+              </a:rPr>
+              <a:t>елементів</a:t>
+            </a:r>
+            <a:r>
+              <a:rPr lang="en-US" sz="1300" dirty="0">
+                <a:solidFill>
+                  <a:srgbClr val="334155"/>
+                </a:solidFill>
+                <a:latin typeface="Calibri" pitchFamily="34" charset="0"/>
+                <a:ea typeface="Calibri" pitchFamily="34" charset="-122"/>
+                <a:cs typeface="Calibri" pitchFamily="34" charset="-120"/>
+              </a:rPr>
+              <a:t> від загальної їх кількості у каталозі</a:t>
             </a:r>
             <a:endParaRPr lang="en-US" sz="1300" dirty="0"/>
           </a:p>
@@ -44584,7 +44837,51 @@
                 <a:ea typeface="Calibri" pitchFamily="34" charset="-122"/>
                 <a:cs typeface="Calibri" pitchFamily="34" charset="-120"/>
               </a:rPr>
-              <a:t>Hit Rate@k — бінарна метрика: чи потрапив хоча б один релевантний item у top-k</a:t>
+              <a:t>Hit Rate@k — бінарна метрика: чи потрапив хоча б один </a:t>
+            </a:r>
+            <a:r>
+              <a:rPr lang="en-US" sz="1300" dirty="0" err="1">
+                <a:solidFill>
+                  <a:srgbClr val="334155"/>
+                </a:solidFill>
+                <a:latin typeface="Calibri" pitchFamily="34" charset="0"/>
+                <a:ea typeface="Calibri" pitchFamily="34" charset="-122"/>
+                <a:cs typeface="Calibri" pitchFamily="34" charset="-120"/>
+              </a:rPr>
+              <a:t>релевантний</a:t>
+            </a:r>
+            <a:r>
+              <a:rPr lang="en-US" sz="1300" dirty="0">
+                <a:solidFill>
+                  <a:srgbClr val="334155"/>
+                </a:solidFill>
+                <a:latin typeface="Calibri" pitchFamily="34" charset="0"/>
+                <a:ea typeface="Calibri" pitchFamily="34" charset="-122"/>
+                <a:cs typeface="Calibri" pitchFamily="34" charset="-120"/>
+              </a:rPr>
+              <a:t> </a:t>
+            </a:r>
+            <a:r>
+              <a:rPr lang="uk-UA" sz="1300" dirty="0">
+                <a:solidFill>
+                  <a:srgbClr val="334155"/>
+                </a:solidFill>
+                <a:latin typeface="Calibri" pitchFamily="34" charset="0"/>
+                <a:ea typeface="Calibri" pitchFamily="34" charset="-122"/>
+                <a:cs typeface="Calibri" pitchFamily="34" charset="-120"/>
+              </a:rPr>
+              <a:t>елемент</a:t>
+            </a:r>
+            <a:r>
+              <a:rPr lang="en-US" sz="1300" dirty="0">
+                <a:solidFill>
+                  <a:srgbClr val="334155"/>
+                </a:solidFill>
+                <a:latin typeface="Calibri" pitchFamily="34" charset="0"/>
+                <a:ea typeface="Calibri" pitchFamily="34" charset="-122"/>
+                <a:cs typeface="Calibri" pitchFamily="34" charset="-120"/>
+              </a:rPr>
+              <a:t> у top-k</a:t>
             </a:r>
             <a:endParaRPr lang="en-US" sz="1300" dirty="0"/>
           </a:p>
@@ -44840,7 +45137,23 @@
                 <a:ea typeface="Calibri" pitchFamily="34" charset="-122"/>
                 <a:cs typeface="Calibri" pitchFamily="34" charset="-120"/>
               </a:rPr>
-              <a:t>✔  Правильна відповідь: В — NDCG@k дисконтує прибуток за log2(позиція+1): item </a:t>
+              <a:t>✔  Правильна відповідь: В — NDCG@k дисконтує прибуток за log2(позиція+1): </a:t>
+            </a:r>
+            <a:r>
+              <a:rPr lang="uk-UA" sz="1150" dirty="0">
+                <a:latin typeface="Calibri" pitchFamily="34" charset="0"/>
+                <a:ea typeface="Calibri" pitchFamily="34" charset="-122"/>
+                <a:cs typeface="Calibri" pitchFamily="34" charset="-120"/>
+              </a:rPr>
+              <a:t>елемент</a:t>
+            </a:r>
+            <a:r>
+              <a:rPr lang="en-US" sz="1150" dirty="0">
+                <a:latin typeface="Calibri" pitchFamily="34" charset="0"/>
+                <a:ea typeface="Calibri" pitchFamily="34" charset="-122"/>
+                <a:cs typeface="Calibri" pitchFamily="34" charset="-120"/>
+              </a:rPr>
+              <a:t> </a:t>
             </a:r>
             <a:r>
               <a:rPr lang="en-US" sz="1150" dirty="0" err="1">
